--- a/reports/generated/zening-teng-contribution/video-simple.pptx
+++ b/reports/generated/zening-teng-contribution/video-simple.pptx
@@ -108,6 +108,11 @@
       </a:defRPr>
     </a:lvl9pPr>
   </p:defaultTextStyle>
+  <p:extLst>
+    <p:ext uri="{EFAFB233-063F-42B5-8137-9DF3F51BA10A}">
+      <p15:sldGuideLst xmlns:p15="http://schemas.microsoft.com/office/powerpoint/2012/main"/>
+    </p:ext>
+  </p:extLst>
 </p:presentation>
 </file>
 
@@ -4130,15 +4135,15 @@
           <a:lstStyle/>
           <a:p>
             <a:r>
-              <a:rPr lang="en-US" altLang="zh-CN" sz="2100">
+              <a:rPr lang="en-US" altLang="zh-CN" sz="2100" dirty="0">
                 <a:solidFill>
                   <a:srgbClr val="545454"/>
                 </a:solidFill>
                 <a:latin typeface="Inter"/>
               </a:rPr>
-              <a:t>Read the PDF. A correct stop is success.</a:t>
-            </a:r>
-            <a:endParaRPr lang="zh-CN" altLang="en-US" sz="2100">
+              <a:t>Read the PDF. A correct skip is success.</a:t>
+            </a:r>
+            <a:endParaRPr lang="zh-CN" altLang="en-US" sz="2100" dirty="0">
               <a:solidFill>
                 <a:srgbClr val="545454"/>
               </a:solidFill>
@@ -4213,7 +4218,7 @@
           <a:p>
             <a:pPr algn="ctr"/>
             <a:r>
-              <a:rPr lang="en-US" altLang="zh-CN" sz="1300" b="1">
+              <a:rPr lang="en-US" altLang="zh-CN" sz="1300" b="1" dirty="0">
                 <a:solidFill>
                   <a:srgbClr val="C8102E"/>
                 </a:solidFill>
@@ -4221,7 +4226,7 @@
               </a:rPr>
               <a:t>LIVENESS</a:t>
             </a:r>
-            <a:endParaRPr lang="zh-CN" altLang="en-US" sz="1300" b="1">
+            <a:endParaRPr lang="zh-CN" altLang="en-US" sz="1300" b="1" dirty="0">
               <a:solidFill>
                 <a:srgbClr val="C8102E"/>
               </a:solidFill>
@@ -4354,15 +4359,15 @@
           <a:p>
             <a:pPr algn="ctr"/>
             <a:r>
-              <a:rPr lang="en-US" altLang="zh-CN" b="1">
+              <a:rPr lang="en-US" altLang="zh-CN" b="1" dirty="0">
                 <a:solidFill>
                   <a:srgbClr val="C8102E"/>
                 </a:solidFill>
                 <a:latin typeface="Inter"/>
               </a:rPr>
-              <a:t>Either zero → correct Skip</a:t>
-            </a:r>
-            <a:endParaRPr lang="zh-CN" altLang="en-US" b="1">
+              <a:t>If 0, skip</a:t>
+            </a:r>
+            <a:endParaRPr lang="zh-CN" altLang="en-US" b="1" dirty="0">
               <a:solidFill>
                 <a:srgbClr val="C8102E"/>
               </a:solidFill>
